--- a/assets/pptx/catalog-157.pptx
+++ b/assets/pptx/catalog-157.pptx
@@ -3385,7 +3385,7 @@
                 <a:ea typeface="Ebrima"/>
                 <a:cs typeface="Ebrima"/>
               </a:rPr>
-              <a:t>ከከፍታዋ ላይ ወርውሯት (2x)</a:t>
+              <a:t>ከከፍታዋ ላይ ወርውሯት 2x</a:t>
             </a:r>
           </a:p>
           <a:p>
@@ -3421,7 +3421,7 @@
                 <a:ea typeface="Ebrima"/>
                 <a:cs typeface="Ebrima"/>
               </a:rPr>
-              <a:t>ከከፍታዋ ላይ ወርውሯት (2x)</a:t>
+              <a:t>ከከፍታዋ ላይ ወርውሯት 2x</a:t>
             </a:r>
           </a:p>
         </p:txBody>
@@ -3627,7 +3627,7 @@
                 <a:ea typeface="Ebrima"/>
                 <a:cs typeface="Ebrima"/>
               </a:rPr>
-              <a:t>ከከፍታዋ ላይ ወርውሯት (2x)</a:t>
+              <a:t>ከከፍታዋ ላይ ወርውሯት 2x</a:t>
             </a:r>
           </a:p>
           <a:p>
@@ -3663,7 +3663,7 @@
                 <a:ea typeface="Ebrima"/>
                 <a:cs typeface="Ebrima"/>
               </a:rPr>
-              <a:t>ከከፍታዋ ላይ ወርውሯት (2x)</a:t>
+              <a:t>ከከፍታዋ ላይ ወርውሯት 2x</a:t>
             </a:r>
           </a:p>
         </p:txBody>
